--- a/seminar-20261005/slides/YouTubeセミナー_v12.pptx
+++ b/seminar-20261005/slides/YouTubeセミナー_v12.pptx
@@ -3772,7 +3772,7 @@
           <a:p>
             <a:r>
               <a:rPr lang="en-US" dirty="0"/>
-              <a:t>（問いかけ）今日か昨日、何かしらのSNSを開きませんでしたか？→ほとんど開いている。お客さんも同じ。お客さんが毎日いる場所に看板を出せる。一番大事：SNSは無料で広告を打てる。撮影・編集はかかるが、編集はAIで下げられる。実例：弟（個人事業主）が高砂に絞ってGoogle広告→月【要確認：金額】、問い合わせはちょこちょこ、成果はそこまで。全国ならもっと必要。広告が合う業種もあるが、ほとんどの会社はSNSをやった方がいい。YouTube動画はGoogle検索にも出る→信用・信頼→依頼・見積もりにつながる。</a:t>
+              <a:t>（問いかけ）今日か昨日、何かしらのSNSを開きませんでしたか？→ほとんど開いている。お客さんも同じ。お客さんが毎日いる場所に看板を出せる。一番大事：SNSは無料で広告を打てる。撮影・編集はかかるが、編集はAIで下げられる。実例：弟（個人事業主）が高砂に絞ってGoogle広告→月20万円ほど、問い合わせはちょこちょこ、成果はそこまで。全国ならもっと必要。広告が合う業種もあるが、ほとんどの会社はSNSをやった方がいい。YouTube動画はGoogle検索にも出る→信用・信頼→依頼・見積もりにつながる。</a:t>
             </a:r>
             <a:endParaRPr lang="en-US" dirty="0"/>
           </a:p>
